--- a/耶和華是愛.pptx
+++ b/耶和華是愛.pptx
@@ -169,7 +169,7 @@
           <a:lstStyle/>
           <a:p>
             <a:r>
-              <a:rPr lang="en-US" altLang="zh-TW" smtClean="0"/>
+              <a:rPr lang="en-US" altLang="zh-TW"/>
               <a:t>Click to edit Master title style</a:t>
             </a:r>
             <a:endParaRPr lang="zh-TW" altLang="en-US"/>
@@ -288,7 +288,7 @@
           </a:lstStyle>
           <a:p>
             <a:r>
-              <a:rPr lang="en-US" altLang="zh-TW" smtClean="0"/>
+              <a:rPr lang="en-US" altLang="zh-TW"/>
               <a:t>Click to edit Master subtitle style</a:t>
             </a:r>
             <a:endParaRPr lang="zh-TW" altLang="en-US"/>
@@ -312,7 +312,7 @@
           <a:p>
             <a:fld id="{4E1EB9D4-5A2D-4F2A-8FB8-D7EA6433C080}" type="datetimeFigureOut">
               <a:rPr lang="en-US" smtClean="0"/>
-              <a:t>9/16/2023</a:t>
+              <a:t>8/2/2025</a:t>
             </a:fld>
             <a:endParaRPr lang="en-US"/>
           </a:p>
@@ -401,7 +401,7 @@
           <a:lstStyle/>
           <a:p>
             <a:r>
-              <a:rPr lang="en-US" altLang="zh-TW" smtClean="0"/>
+              <a:rPr lang="en-US" altLang="zh-TW"/>
               <a:t>Click to edit Master title style</a:t>
             </a:r>
             <a:endParaRPr lang="zh-TW" altLang="en-US"/>
@@ -425,35 +425,35 @@
           <a:p>
             <a:pPr lvl="0"/>
             <a:r>
-              <a:rPr lang="en-US" altLang="zh-TW" smtClean="0"/>
+              <a:rPr lang="en-US" altLang="zh-TW"/>
               <a:t>Click to edit Master text styles</a:t>
             </a:r>
           </a:p>
           <a:p>
             <a:pPr lvl="1"/>
             <a:r>
-              <a:rPr lang="en-US" altLang="zh-TW" smtClean="0"/>
+              <a:rPr lang="en-US" altLang="zh-TW"/>
               <a:t>Second level</a:t>
             </a:r>
           </a:p>
           <a:p>
             <a:pPr lvl="2"/>
             <a:r>
-              <a:rPr lang="en-US" altLang="zh-TW" smtClean="0"/>
+              <a:rPr lang="en-US" altLang="zh-TW"/>
               <a:t>Third level</a:t>
             </a:r>
           </a:p>
           <a:p>
             <a:pPr lvl="3"/>
             <a:r>
-              <a:rPr lang="en-US" altLang="zh-TW" smtClean="0"/>
+              <a:rPr lang="en-US" altLang="zh-TW"/>
               <a:t>Fourth level</a:t>
             </a:r>
           </a:p>
           <a:p>
             <a:pPr lvl="4"/>
             <a:r>
-              <a:rPr lang="en-US" altLang="zh-TW" smtClean="0"/>
+              <a:rPr lang="en-US" altLang="zh-TW"/>
               <a:t>Fifth level</a:t>
             </a:r>
             <a:endParaRPr lang="zh-TW" altLang="en-US"/>
@@ -477,7 +477,7 @@
           <a:p>
             <a:fld id="{4E1EB9D4-5A2D-4F2A-8FB8-D7EA6433C080}" type="datetimeFigureOut">
               <a:rPr lang="en-US" smtClean="0"/>
-              <a:t>9/16/2023</a:t>
+              <a:t>8/2/2025</a:t>
             </a:fld>
             <a:endParaRPr lang="en-US"/>
           </a:p>
@@ -571,7 +571,7 @@
           <a:lstStyle/>
           <a:p>
             <a:r>
-              <a:rPr lang="en-US" altLang="zh-TW" smtClean="0"/>
+              <a:rPr lang="en-US" altLang="zh-TW"/>
               <a:t>Click to edit Master title style</a:t>
             </a:r>
             <a:endParaRPr lang="zh-TW" altLang="en-US"/>
@@ -600,35 +600,35 @@
           <a:p>
             <a:pPr lvl="0"/>
             <a:r>
-              <a:rPr lang="en-US" altLang="zh-TW" smtClean="0"/>
+              <a:rPr lang="en-US" altLang="zh-TW"/>
               <a:t>Click to edit Master text styles</a:t>
             </a:r>
           </a:p>
           <a:p>
             <a:pPr lvl="1"/>
             <a:r>
-              <a:rPr lang="en-US" altLang="zh-TW" smtClean="0"/>
+              <a:rPr lang="en-US" altLang="zh-TW"/>
               <a:t>Second level</a:t>
             </a:r>
           </a:p>
           <a:p>
             <a:pPr lvl="2"/>
             <a:r>
-              <a:rPr lang="en-US" altLang="zh-TW" smtClean="0"/>
+              <a:rPr lang="en-US" altLang="zh-TW"/>
               <a:t>Third level</a:t>
             </a:r>
           </a:p>
           <a:p>
             <a:pPr lvl="3"/>
             <a:r>
-              <a:rPr lang="en-US" altLang="zh-TW" smtClean="0"/>
+              <a:rPr lang="en-US" altLang="zh-TW"/>
               <a:t>Fourth level</a:t>
             </a:r>
           </a:p>
           <a:p>
             <a:pPr lvl="4"/>
             <a:r>
-              <a:rPr lang="en-US" altLang="zh-TW" smtClean="0"/>
+              <a:rPr lang="en-US" altLang="zh-TW"/>
               <a:t>Fifth level</a:t>
             </a:r>
             <a:endParaRPr lang="zh-TW" altLang="en-US"/>
@@ -652,7 +652,7 @@
           <a:p>
             <a:fld id="{4E1EB9D4-5A2D-4F2A-8FB8-D7EA6433C080}" type="datetimeFigureOut">
               <a:rPr lang="en-US" smtClean="0"/>
-              <a:t>9/16/2023</a:t>
+              <a:t>8/2/2025</a:t>
             </a:fld>
             <a:endParaRPr lang="en-US"/>
           </a:p>
@@ -741,7 +741,7 @@
           <a:lstStyle/>
           <a:p>
             <a:r>
-              <a:rPr lang="en-US" altLang="zh-TW" smtClean="0"/>
+              <a:rPr lang="en-US" altLang="zh-TW"/>
               <a:t>Click to edit Master title style</a:t>
             </a:r>
             <a:endParaRPr lang="zh-TW" altLang="en-US"/>
@@ -765,35 +765,35 @@
           <a:p>
             <a:pPr lvl="0"/>
             <a:r>
-              <a:rPr lang="en-US" altLang="zh-TW" smtClean="0"/>
+              <a:rPr lang="en-US" altLang="zh-TW"/>
               <a:t>Click to edit Master text styles</a:t>
             </a:r>
           </a:p>
           <a:p>
             <a:pPr lvl="1"/>
             <a:r>
-              <a:rPr lang="en-US" altLang="zh-TW" smtClean="0"/>
+              <a:rPr lang="en-US" altLang="zh-TW"/>
               <a:t>Second level</a:t>
             </a:r>
           </a:p>
           <a:p>
             <a:pPr lvl="2"/>
             <a:r>
-              <a:rPr lang="en-US" altLang="zh-TW" smtClean="0"/>
+              <a:rPr lang="en-US" altLang="zh-TW"/>
               <a:t>Third level</a:t>
             </a:r>
           </a:p>
           <a:p>
             <a:pPr lvl="3"/>
             <a:r>
-              <a:rPr lang="en-US" altLang="zh-TW" smtClean="0"/>
+              <a:rPr lang="en-US" altLang="zh-TW"/>
               <a:t>Fourth level</a:t>
             </a:r>
           </a:p>
           <a:p>
             <a:pPr lvl="4"/>
             <a:r>
-              <a:rPr lang="en-US" altLang="zh-TW" smtClean="0"/>
+              <a:rPr lang="en-US" altLang="zh-TW"/>
               <a:t>Fifth level</a:t>
             </a:r>
             <a:endParaRPr lang="zh-TW" altLang="en-US"/>
@@ -817,7 +817,7 @@
           <a:p>
             <a:fld id="{4E1EB9D4-5A2D-4F2A-8FB8-D7EA6433C080}" type="datetimeFigureOut">
               <a:rPr lang="en-US" smtClean="0"/>
-              <a:t>9/16/2023</a:t>
+              <a:t>8/2/2025</a:t>
             </a:fld>
             <a:endParaRPr lang="en-US"/>
           </a:p>
@@ -915,7 +915,7 @@
           </a:lstStyle>
           <a:p>
             <a:r>
-              <a:rPr lang="en-US" altLang="zh-TW" smtClean="0"/>
+              <a:rPr lang="en-US" altLang="zh-TW"/>
               <a:t>Click to edit Master title style</a:t>
             </a:r>
             <a:endParaRPr lang="zh-TW" altLang="en-US"/>
@@ -1035,7 +1035,7 @@
           <a:p>
             <a:pPr lvl="0"/>
             <a:r>
-              <a:rPr lang="en-US" altLang="zh-TW" smtClean="0"/>
+              <a:rPr lang="en-US" altLang="zh-TW"/>
               <a:t>Click to edit Master text styles</a:t>
             </a:r>
           </a:p>
@@ -1058,7 +1058,7 @@
           <a:p>
             <a:fld id="{4E1EB9D4-5A2D-4F2A-8FB8-D7EA6433C080}" type="datetimeFigureOut">
               <a:rPr lang="en-US" smtClean="0"/>
-              <a:t>9/16/2023</a:t>
+              <a:t>8/2/2025</a:t>
             </a:fld>
             <a:endParaRPr lang="en-US"/>
           </a:p>
@@ -1147,7 +1147,7 @@
           <a:lstStyle/>
           <a:p>
             <a:r>
-              <a:rPr lang="en-US" altLang="zh-TW" smtClean="0"/>
+              <a:rPr lang="en-US" altLang="zh-TW"/>
               <a:t>Click to edit Master title style</a:t>
             </a:r>
             <a:endParaRPr lang="zh-TW" altLang="en-US"/>
@@ -1204,35 +1204,35 @@
           <a:p>
             <a:pPr lvl="0"/>
             <a:r>
-              <a:rPr lang="en-US" altLang="zh-TW" smtClean="0"/>
+              <a:rPr lang="en-US" altLang="zh-TW"/>
               <a:t>Click to edit Master text styles</a:t>
             </a:r>
           </a:p>
           <a:p>
             <a:pPr lvl="1"/>
             <a:r>
-              <a:rPr lang="en-US" altLang="zh-TW" smtClean="0"/>
+              <a:rPr lang="en-US" altLang="zh-TW"/>
               <a:t>Second level</a:t>
             </a:r>
           </a:p>
           <a:p>
             <a:pPr lvl="2"/>
             <a:r>
-              <a:rPr lang="en-US" altLang="zh-TW" smtClean="0"/>
+              <a:rPr lang="en-US" altLang="zh-TW"/>
               <a:t>Third level</a:t>
             </a:r>
           </a:p>
           <a:p>
             <a:pPr lvl="3"/>
             <a:r>
-              <a:rPr lang="en-US" altLang="zh-TW" smtClean="0"/>
+              <a:rPr lang="en-US" altLang="zh-TW"/>
               <a:t>Fourth level</a:t>
             </a:r>
           </a:p>
           <a:p>
             <a:pPr lvl="4"/>
             <a:r>
-              <a:rPr lang="en-US" altLang="zh-TW" smtClean="0"/>
+              <a:rPr lang="en-US" altLang="zh-TW"/>
               <a:t>Fifth level</a:t>
             </a:r>
             <a:endParaRPr lang="zh-TW" altLang="en-US"/>
@@ -1289,35 +1289,35 @@
           <a:p>
             <a:pPr lvl="0"/>
             <a:r>
-              <a:rPr lang="en-US" altLang="zh-TW" smtClean="0"/>
+              <a:rPr lang="en-US" altLang="zh-TW"/>
               <a:t>Click to edit Master text styles</a:t>
             </a:r>
           </a:p>
           <a:p>
             <a:pPr lvl="1"/>
             <a:r>
-              <a:rPr lang="en-US" altLang="zh-TW" smtClean="0"/>
+              <a:rPr lang="en-US" altLang="zh-TW"/>
               <a:t>Second level</a:t>
             </a:r>
           </a:p>
           <a:p>
             <a:pPr lvl="2"/>
             <a:r>
-              <a:rPr lang="en-US" altLang="zh-TW" smtClean="0"/>
+              <a:rPr lang="en-US" altLang="zh-TW"/>
               <a:t>Third level</a:t>
             </a:r>
           </a:p>
           <a:p>
             <a:pPr lvl="3"/>
             <a:r>
-              <a:rPr lang="en-US" altLang="zh-TW" smtClean="0"/>
+              <a:rPr lang="en-US" altLang="zh-TW"/>
               <a:t>Fourth level</a:t>
             </a:r>
           </a:p>
           <a:p>
             <a:pPr lvl="4"/>
             <a:r>
-              <a:rPr lang="en-US" altLang="zh-TW" smtClean="0"/>
+              <a:rPr lang="en-US" altLang="zh-TW"/>
               <a:t>Fifth level</a:t>
             </a:r>
             <a:endParaRPr lang="zh-TW" altLang="en-US"/>
@@ -1341,7 +1341,7 @@
           <a:p>
             <a:fld id="{4E1EB9D4-5A2D-4F2A-8FB8-D7EA6433C080}" type="datetimeFigureOut">
               <a:rPr lang="en-US" smtClean="0"/>
-              <a:t>9/16/2023</a:t>
+              <a:t>8/2/2025</a:t>
             </a:fld>
             <a:endParaRPr lang="en-US"/>
           </a:p>
@@ -1434,7 +1434,7 @@
           </a:lstStyle>
           <a:p>
             <a:r>
-              <a:rPr lang="en-US" altLang="zh-TW" smtClean="0"/>
+              <a:rPr lang="en-US" altLang="zh-TW"/>
               <a:t>Click to edit Master title style</a:t>
             </a:r>
             <a:endParaRPr lang="zh-TW" altLang="en-US"/>
@@ -1500,7 +1500,7 @@
           <a:p>
             <a:pPr lvl="0"/>
             <a:r>
-              <a:rPr lang="en-US" altLang="zh-TW" smtClean="0"/>
+              <a:rPr lang="en-US" altLang="zh-TW"/>
               <a:t>Click to edit Master text styles</a:t>
             </a:r>
           </a:p>
@@ -1556,35 +1556,35 @@
           <a:p>
             <a:pPr lvl="0"/>
             <a:r>
-              <a:rPr lang="en-US" altLang="zh-TW" smtClean="0"/>
+              <a:rPr lang="en-US" altLang="zh-TW"/>
               <a:t>Click to edit Master text styles</a:t>
             </a:r>
           </a:p>
           <a:p>
             <a:pPr lvl="1"/>
             <a:r>
-              <a:rPr lang="en-US" altLang="zh-TW" smtClean="0"/>
+              <a:rPr lang="en-US" altLang="zh-TW"/>
               <a:t>Second level</a:t>
             </a:r>
           </a:p>
           <a:p>
             <a:pPr lvl="2"/>
             <a:r>
-              <a:rPr lang="en-US" altLang="zh-TW" smtClean="0"/>
+              <a:rPr lang="en-US" altLang="zh-TW"/>
               <a:t>Third level</a:t>
             </a:r>
           </a:p>
           <a:p>
             <a:pPr lvl="3"/>
             <a:r>
-              <a:rPr lang="en-US" altLang="zh-TW" smtClean="0"/>
+              <a:rPr lang="en-US" altLang="zh-TW"/>
               <a:t>Fourth level</a:t>
             </a:r>
           </a:p>
           <a:p>
             <a:pPr lvl="4"/>
             <a:r>
-              <a:rPr lang="en-US" altLang="zh-TW" smtClean="0"/>
+              <a:rPr lang="en-US" altLang="zh-TW"/>
               <a:t>Fifth level</a:t>
             </a:r>
             <a:endParaRPr lang="zh-TW" altLang="en-US"/>
@@ -1650,7 +1650,7 @@
           <a:p>
             <a:pPr lvl="0"/>
             <a:r>
-              <a:rPr lang="en-US" altLang="zh-TW" smtClean="0"/>
+              <a:rPr lang="en-US" altLang="zh-TW"/>
               <a:t>Click to edit Master text styles</a:t>
             </a:r>
           </a:p>
@@ -1706,35 +1706,35 @@
           <a:p>
             <a:pPr lvl="0"/>
             <a:r>
-              <a:rPr lang="en-US" altLang="zh-TW" smtClean="0"/>
+              <a:rPr lang="en-US" altLang="zh-TW"/>
               <a:t>Click to edit Master text styles</a:t>
             </a:r>
           </a:p>
           <a:p>
             <a:pPr lvl="1"/>
             <a:r>
-              <a:rPr lang="en-US" altLang="zh-TW" smtClean="0"/>
+              <a:rPr lang="en-US" altLang="zh-TW"/>
               <a:t>Second level</a:t>
             </a:r>
           </a:p>
           <a:p>
             <a:pPr lvl="2"/>
             <a:r>
-              <a:rPr lang="en-US" altLang="zh-TW" smtClean="0"/>
+              <a:rPr lang="en-US" altLang="zh-TW"/>
               <a:t>Third level</a:t>
             </a:r>
           </a:p>
           <a:p>
             <a:pPr lvl="3"/>
             <a:r>
-              <a:rPr lang="en-US" altLang="zh-TW" smtClean="0"/>
+              <a:rPr lang="en-US" altLang="zh-TW"/>
               <a:t>Fourth level</a:t>
             </a:r>
           </a:p>
           <a:p>
             <a:pPr lvl="4"/>
             <a:r>
-              <a:rPr lang="en-US" altLang="zh-TW" smtClean="0"/>
+              <a:rPr lang="en-US" altLang="zh-TW"/>
               <a:t>Fifth level</a:t>
             </a:r>
             <a:endParaRPr lang="zh-TW" altLang="en-US"/>
@@ -1758,7 +1758,7 @@
           <a:p>
             <a:fld id="{4E1EB9D4-5A2D-4F2A-8FB8-D7EA6433C080}" type="datetimeFigureOut">
               <a:rPr lang="en-US" smtClean="0"/>
-              <a:t>9/16/2023</a:t>
+              <a:t>8/2/2025</a:t>
             </a:fld>
             <a:endParaRPr lang="en-US"/>
           </a:p>
@@ -1847,7 +1847,7 @@
           <a:lstStyle/>
           <a:p>
             <a:r>
-              <a:rPr lang="en-US" altLang="zh-TW" smtClean="0"/>
+              <a:rPr lang="en-US" altLang="zh-TW"/>
               <a:t>Click to edit Master title style</a:t>
             </a:r>
             <a:endParaRPr lang="zh-TW" altLang="en-US"/>
@@ -1871,7 +1871,7 @@
           <a:p>
             <a:fld id="{4E1EB9D4-5A2D-4F2A-8FB8-D7EA6433C080}" type="datetimeFigureOut">
               <a:rPr lang="en-US" smtClean="0"/>
-              <a:t>9/16/2023</a:t>
+              <a:t>8/2/2025</a:t>
             </a:fld>
             <a:endParaRPr lang="en-US"/>
           </a:p>
@@ -1961,7 +1961,7 @@
           <a:p>
             <a:fld id="{4E1EB9D4-5A2D-4F2A-8FB8-D7EA6433C080}" type="datetimeFigureOut">
               <a:rPr lang="en-US" smtClean="0"/>
-              <a:t>9/16/2023</a:t>
+              <a:t>8/2/2025</a:t>
             </a:fld>
             <a:endParaRPr lang="en-US"/>
           </a:p>
@@ -2059,7 +2059,7 @@
           </a:lstStyle>
           <a:p>
             <a:r>
-              <a:rPr lang="en-US" altLang="zh-TW" smtClean="0"/>
+              <a:rPr lang="en-US" altLang="zh-TW"/>
               <a:t>Click to edit Master title style</a:t>
             </a:r>
             <a:endParaRPr lang="zh-TW" altLang="en-US"/>
@@ -2116,35 +2116,35 @@
           <a:p>
             <a:pPr lvl="0"/>
             <a:r>
-              <a:rPr lang="en-US" altLang="zh-TW" smtClean="0"/>
+              <a:rPr lang="en-US" altLang="zh-TW"/>
               <a:t>Click to edit Master text styles</a:t>
             </a:r>
           </a:p>
           <a:p>
             <a:pPr lvl="1"/>
             <a:r>
-              <a:rPr lang="en-US" altLang="zh-TW" smtClean="0"/>
+              <a:rPr lang="en-US" altLang="zh-TW"/>
               <a:t>Second level</a:t>
             </a:r>
           </a:p>
           <a:p>
             <a:pPr lvl="2"/>
             <a:r>
-              <a:rPr lang="en-US" altLang="zh-TW" smtClean="0"/>
+              <a:rPr lang="en-US" altLang="zh-TW"/>
               <a:t>Third level</a:t>
             </a:r>
           </a:p>
           <a:p>
             <a:pPr lvl="3"/>
             <a:r>
-              <a:rPr lang="en-US" altLang="zh-TW" smtClean="0"/>
+              <a:rPr lang="en-US" altLang="zh-TW"/>
               <a:t>Fourth level</a:t>
             </a:r>
           </a:p>
           <a:p>
             <a:pPr lvl="4"/>
             <a:r>
-              <a:rPr lang="en-US" altLang="zh-TW" smtClean="0"/>
+              <a:rPr lang="en-US" altLang="zh-TW"/>
               <a:t>Fifth level</a:t>
             </a:r>
             <a:endParaRPr lang="zh-TW" altLang="en-US"/>
@@ -2210,7 +2210,7 @@
           <a:p>
             <a:pPr lvl="0"/>
             <a:r>
-              <a:rPr lang="en-US" altLang="zh-TW" smtClean="0"/>
+              <a:rPr lang="en-US" altLang="zh-TW"/>
               <a:t>Click to edit Master text styles</a:t>
             </a:r>
           </a:p>
@@ -2233,7 +2233,7 @@
           <a:p>
             <a:fld id="{4E1EB9D4-5A2D-4F2A-8FB8-D7EA6433C080}" type="datetimeFigureOut">
               <a:rPr lang="en-US" smtClean="0"/>
-              <a:t>9/16/2023</a:t>
+              <a:t>8/2/2025</a:t>
             </a:fld>
             <a:endParaRPr lang="en-US"/>
           </a:p>
@@ -2331,7 +2331,7 @@
           </a:lstStyle>
           <a:p>
             <a:r>
-              <a:rPr lang="en-US" altLang="zh-TW" smtClean="0"/>
+              <a:rPr lang="en-US" altLang="zh-TW"/>
               <a:t>Click to edit Master title style</a:t>
             </a:r>
             <a:endParaRPr lang="zh-TW" altLang="en-US"/>
@@ -2396,7 +2396,7 @@
           </a:lstStyle>
           <a:p>
             <a:r>
-              <a:rPr lang="en-US" altLang="zh-TW" smtClean="0"/>
+              <a:rPr lang="en-US" altLang="zh-TW"/>
               <a:t>Click icon to add picture</a:t>
             </a:r>
             <a:endParaRPr lang="zh-TW" altLang="en-US"/>
@@ -2462,7 +2462,7 @@
           <a:p>
             <a:pPr lvl="0"/>
             <a:r>
-              <a:rPr lang="en-US" altLang="zh-TW" smtClean="0"/>
+              <a:rPr lang="en-US" altLang="zh-TW"/>
               <a:t>Click to edit Master text styles</a:t>
             </a:r>
           </a:p>
@@ -2485,7 +2485,7 @@
           <a:p>
             <a:fld id="{4E1EB9D4-5A2D-4F2A-8FB8-D7EA6433C080}" type="datetimeFigureOut">
               <a:rPr lang="en-US" smtClean="0"/>
-              <a:t>9/16/2023</a:t>
+              <a:t>8/2/2025</a:t>
             </a:fld>
             <a:endParaRPr lang="en-US"/>
           </a:p>
@@ -2594,10 +2594,9 @@
           <a:lstStyle/>
           <a:p>
             <a:r>
-              <a:rPr lang="zh-TW" altLang="en-US" smtClean="0"/>
+              <a:rPr lang="zh-TW" altLang="en-US"/>
               <a:t>按一下以編輯母片標題樣式</a:t>
             </a:r>
-            <a:endParaRPr lang="zh-TW" altLang="en-US"/>
           </a:p>
         </p:txBody>
       </p:sp>
@@ -2628,38 +2627,37 @@
           <a:p>
             <a:pPr lvl="0"/>
             <a:r>
-              <a:rPr lang="zh-TW" altLang="en-US" smtClean="0"/>
+              <a:rPr lang="zh-TW" altLang="en-US"/>
               <a:t>按一下以編輯母片文字樣式</a:t>
             </a:r>
           </a:p>
           <a:p>
             <a:pPr lvl="1"/>
             <a:r>
-              <a:rPr lang="zh-TW" altLang="en-US" smtClean="0"/>
+              <a:rPr lang="zh-TW" altLang="en-US"/>
               <a:t>第二層</a:t>
             </a:r>
           </a:p>
           <a:p>
             <a:pPr lvl="2"/>
             <a:r>
-              <a:rPr lang="zh-TW" altLang="en-US" smtClean="0"/>
+              <a:rPr lang="zh-TW" altLang="en-US"/>
               <a:t>第三層</a:t>
             </a:r>
           </a:p>
           <a:p>
             <a:pPr lvl="3"/>
             <a:r>
-              <a:rPr lang="zh-TW" altLang="en-US" smtClean="0"/>
+              <a:rPr lang="zh-TW" altLang="en-US"/>
               <a:t>第四層</a:t>
             </a:r>
           </a:p>
           <a:p>
             <a:pPr lvl="4"/>
             <a:r>
-              <a:rPr lang="zh-TW" altLang="en-US" smtClean="0"/>
+              <a:rPr lang="zh-TW" altLang="en-US"/>
               <a:t>第五層</a:t>
             </a:r>
-            <a:endParaRPr lang="zh-TW" altLang="en-US"/>
           </a:p>
         </p:txBody>
       </p:sp>
@@ -2698,7 +2696,7 @@
           <a:p>
             <a:fld id="{4E1EB9D4-5A2D-4F2A-8FB8-D7EA6433C080}" type="datetimeFigureOut">
               <a:rPr lang="en-US" smtClean="0"/>
-              <a:t>9/16/2023</a:t>
+              <a:t>8/2/2025</a:t>
             </a:fld>
             <a:endParaRPr lang="en-US"/>
           </a:p>
@@ -3091,7 +3089,7 @@
           <a:lstStyle/>
           <a:p>
             <a:r>
-              <a:rPr lang="zh-TW" altLang="en-US" sz="5400" b="1" i="1" dirty="0" smtClean="0">
+              <a:rPr lang="zh-TW" altLang="en-US" sz="5400" b="1" i="1" dirty="0">
                 <a:solidFill>
                   <a:srgbClr val="000066"/>
                 </a:solidFill>
@@ -3105,24 +3103,7 @@
                 <a:latin typeface="微軟正黑體" pitchFamily="34" charset="-120"/>
                 <a:ea typeface="微軟正黑體" pitchFamily="34" charset="-120"/>
               </a:rPr>
-              <a:t>耶</a:t>
-            </a:r>
-            <a:r>
-              <a:rPr lang="zh-TW" altLang="en-US" sz="5400" b="1" i="1" dirty="0">
-                <a:solidFill>
-                  <a:srgbClr val="000066"/>
-                </a:solidFill>
-                <a:effectLst>
-                  <a:outerShdw blurRad="38100" dist="38100" dir="2700000" algn="tl">
-                    <a:srgbClr val="000000">
-                      <a:alpha val="43137"/>
-                    </a:srgbClr>
-                  </a:outerShdw>
-                </a:effectLst>
-                <a:latin typeface="微軟正黑體" pitchFamily="34" charset="-120"/>
-                <a:ea typeface="微軟正黑體" pitchFamily="34" charset="-120"/>
-              </a:rPr>
-              <a:t>和華是愛</a:t>
+              <a:t>耶和華是愛</a:t>
             </a:r>
           </a:p>
         </p:txBody>
@@ -3219,7 +3200,7 @@
               </a:rPr>
               <a:t>讓我安歇青草溪水邊</a:t>
             </a:r>
-            <a:endParaRPr lang="en-US" altLang="zh-TW" sz="4800" b="1" dirty="0" smtClean="0">
+            <a:endParaRPr lang="en-US" altLang="zh-TW" sz="4800" b="1" dirty="0">
               <a:solidFill>
                 <a:srgbClr val="000066"/>
               </a:solidFill>
@@ -3253,7 +3234,7 @@
           <a:p>
             <a:pPr algn="ctr"/>
             <a:r>
-              <a:rPr lang="en-US" sz="2400" b="1" dirty="0" smtClean="0">
+              <a:rPr lang="en-US" sz="2400" b="1" dirty="0">
                 <a:solidFill>
                   <a:srgbClr val="000066"/>
                 </a:solidFill>
@@ -3263,17 +3244,17 @@
               <a:t>( </a:t>
             </a:r>
             <a:r>
-              <a:rPr lang="zh-CN" altLang="en-US" sz="2400" b="1" dirty="0" smtClean="0">
+              <a:rPr lang="zh-CN" altLang="en-US" sz="2400" b="1" dirty="0">
                 <a:solidFill>
                   <a:srgbClr val="000066"/>
                 </a:solidFill>
                 <a:latin typeface="Microsoft JhengHei" panose="020B0604030504040204" pitchFamily="34" charset="-120"/>
                 <a:ea typeface="Microsoft JhengHei" panose="020B0604030504040204" pitchFamily="34" charset="-120"/>
               </a:rPr>
-              <a:t>正</a:t>
-            </a:r>
-            <a:r>
-              <a:rPr lang="en-US" sz="2400" b="1" dirty="0" smtClean="0">
+              <a:t>正歌</a:t>
+            </a:r>
+            <a:r>
+              <a:rPr lang="en-US" sz="2400" b="1" dirty="0">
                 <a:solidFill>
                   <a:srgbClr val="000066"/>
                 </a:solidFill>
@@ -3432,7 +3413,7 @@
           <a:p>
             <a:pPr algn="ctr"/>
             <a:r>
-              <a:rPr lang="en-US" sz="2400" b="1" dirty="0" smtClean="0">
+              <a:rPr lang="en-US" sz="2400" b="1" dirty="0">
                 <a:solidFill>
                   <a:srgbClr val="000066"/>
                 </a:solidFill>
@@ -3442,17 +3423,17 @@
               <a:t>( </a:t>
             </a:r>
             <a:r>
-              <a:rPr lang="zh-CN" altLang="en-US" sz="2400" b="1" dirty="0" smtClean="0">
+              <a:rPr lang="zh-CN" altLang="en-US" sz="2400" b="1" dirty="0">
                 <a:solidFill>
                   <a:srgbClr val="000066"/>
                 </a:solidFill>
                 <a:latin typeface="Microsoft JhengHei" panose="020B0604030504040204" pitchFamily="34" charset="-120"/>
                 <a:ea typeface="Microsoft JhengHei" panose="020B0604030504040204" pitchFamily="34" charset="-120"/>
               </a:rPr>
-              <a:t>正</a:t>
-            </a:r>
-            <a:r>
-              <a:rPr lang="en-US" sz="2400" b="1" dirty="0" smtClean="0">
+              <a:t>正歌</a:t>
+            </a:r>
+            <a:r>
+              <a:rPr lang="en-US" sz="2400" b="1" dirty="0">
                 <a:solidFill>
                   <a:srgbClr val="000066"/>
                 </a:solidFill>
@@ -3608,7 +3589,7 @@
           <a:p>
             <a:pPr algn="ctr"/>
             <a:r>
-              <a:rPr lang="en-US" sz="2400" b="1" dirty="0" smtClean="0">
+              <a:rPr lang="en-US" sz="2400" b="1" dirty="0">
                 <a:solidFill>
                   <a:srgbClr val="000066"/>
                 </a:solidFill>
@@ -3618,17 +3599,17 @@
               <a:t>( </a:t>
             </a:r>
             <a:r>
-              <a:rPr lang="zh-CN" altLang="en-US" sz="2400" b="1" dirty="0" smtClean="0">
+              <a:rPr lang="zh-CN" altLang="en-US" sz="2400" b="1" dirty="0">
                 <a:solidFill>
                   <a:srgbClr val="000066"/>
                 </a:solidFill>
                 <a:latin typeface="Microsoft JhengHei" panose="020B0604030504040204" pitchFamily="34" charset="-120"/>
                 <a:ea typeface="Microsoft JhengHei" panose="020B0604030504040204" pitchFamily="34" charset="-120"/>
               </a:rPr>
-              <a:t>正</a:t>
-            </a:r>
-            <a:r>
-              <a:rPr lang="en-US" sz="2400" b="1" dirty="0" smtClean="0">
+              <a:t>正歌</a:t>
+            </a:r>
+            <a:r>
+              <a:rPr lang="en-US" sz="2400" b="1" dirty="0">
                 <a:solidFill>
                   <a:srgbClr val="000066"/>
                 </a:solidFill>
@@ -3749,14 +3730,6 @@
               </a:rPr>
               <a:t>在危難也不改變</a:t>
             </a:r>
-            <a:endParaRPr lang="zh-TW" altLang="en-US" sz="4800" b="1" spc="50" dirty="0">
-              <a:ln w="11430"/>
-              <a:solidFill>
-                <a:srgbClr val="000066"/>
-              </a:solidFill>
-              <a:latin typeface="微軟正黑體" pitchFamily="34" charset="-120"/>
-              <a:ea typeface="微軟正黑體" pitchFamily="34" charset="-120"/>
-            </a:endParaRPr>
           </a:p>
         </p:txBody>
       </p:sp>
@@ -3784,7 +3757,7 @@
           <a:p>
             <a:pPr algn="ctr"/>
             <a:r>
-              <a:rPr lang="en-US" sz="2400" b="1" dirty="0" smtClean="0">
+              <a:rPr lang="en-US" sz="2400" b="1" dirty="0">
                 <a:solidFill>
                   <a:srgbClr val="000066"/>
                 </a:solidFill>
@@ -3794,17 +3767,17 @@
               <a:t>( </a:t>
             </a:r>
             <a:r>
-              <a:rPr lang="zh-CN" altLang="en-US" sz="2400" b="1" dirty="0" smtClean="0">
+              <a:rPr lang="zh-CN" altLang="en-US" sz="2400" b="1" dirty="0">
                 <a:solidFill>
                   <a:srgbClr val="000066"/>
                 </a:solidFill>
                 <a:latin typeface="Microsoft JhengHei" panose="020B0604030504040204" pitchFamily="34" charset="-120"/>
                 <a:ea typeface="Microsoft JhengHei" panose="020B0604030504040204" pitchFamily="34" charset="-120"/>
               </a:rPr>
-              <a:t>正</a:t>
-            </a:r>
-            <a:r>
-              <a:rPr lang="en-US" sz="2400" b="1" dirty="0" smtClean="0">
+              <a:t>正歌</a:t>
+            </a:r>
+            <a:r>
+              <a:rPr lang="en-US" sz="2400" b="1" dirty="0">
                 <a:solidFill>
                   <a:srgbClr val="000066"/>
                 </a:solidFill>
@@ -3949,7 +3922,7 @@
           <a:p>
             <a:pPr algn="ctr"/>
             <a:r>
-              <a:rPr lang="en-US" sz="2400" b="1" dirty="0" smtClean="0">
+              <a:rPr lang="en-US" sz="2400" b="1" dirty="0">
                 <a:solidFill>
                   <a:srgbClr val="000066"/>
                 </a:solidFill>
@@ -3959,34 +3932,24 @@
               <a:t>( </a:t>
             </a:r>
             <a:r>
-              <a:rPr lang="zh-CN" altLang="en-US" sz="2400" b="1" dirty="0" smtClean="0">
+              <a:rPr lang="zh-CN" altLang="en-US" sz="2400" b="1" dirty="0">
                 <a:solidFill>
                   <a:srgbClr val="000066"/>
                 </a:solidFill>
                 <a:latin typeface="Microsoft JhengHei" panose="020B0604030504040204" pitchFamily="34" charset="-120"/>
                 <a:ea typeface="Microsoft JhengHei" panose="020B0604030504040204" pitchFamily="34" charset="-120"/>
               </a:rPr>
-              <a:t>副</a:t>
-            </a:r>
-            <a:r>
-              <a:rPr lang="en-US" sz="2400" b="1" dirty="0" smtClean="0">
+              <a:t>副歌</a:t>
+            </a:r>
+            <a:r>
+              <a:rPr lang="en-US" sz="2400" b="1" dirty="0">
                 <a:solidFill>
                   <a:srgbClr val="000066"/>
                 </a:solidFill>
                 <a:latin typeface="Microsoft JhengHei" panose="020B0604030504040204" pitchFamily="34" charset="-120"/>
                 <a:ea typeface="Microsoft JhengHei" panose="020B0604030504040204" pitchFamily="34" charset="-120"/>
               </a:rPr>
-              <a:t> </a:t>
-            </a:r>
-            <a:r>
-              <a:rPr lang="en-US" sz="2400" b="1" dirty="0" smtClean="0">
-                <a:solidFill>
-                  <a:srgbClr val="000066"/>
-                </a:solidFill>
-                <a:latin typeface="Microsoft JhengHei" panose="020B0604030504040204" pitchFamily="34" charset="-120"/>
-                <a:ea typeface="Microsoft JhengHei" panose="020B0604030504040204" pitchFamily="34" charset="-120"/>
-              </a:rPr>
-              <a:t>)</a:t>
+              <a:t> )</a:t>
             </a:r>
             <a:endParaRPr lang="vi-VN" sz="2400" b="1" dirty="0">
               <a:solidFill>
@@ -4089,14 +4052,6 @@
               </a:rPr>
               <a:t>共同渡此世</a:t>
             </a:r>
-            <a:endParaRPr lang="zh-TW" altLang="en-US" sz="4800" b="1" spc="50" dirty="0">
-              <a:ln w="11430"/>
-              <a:solidFill>
-                <a:srgbClr val="000066"/>
-              </a:solidFill>
-              <a:latin typeface="微軟正黑體" pitchFamily="34" charset="-120"/>
-              <a:ea typeface="微軟正黑體" pitchFamily="34" charset="-120"/>
-            </a:endParaRPr>
           </a:p>
         </p:txBody>
       </p:sp>
@@ -4124,7 +4079,7 @@
           <a:p>
             <a:pPr algn="ctr"/>
             <a:r>
-              <a:rPr lang="en-US" sz="2400" b="1" dirty="0" smtClean="0">
+              <a:rPr lang="en-US" sz="2400" b="1" dirty="0">
                 <a:solidFill>
                   <a:srgbClr val="000066"/>
                 </a:solidFill>
@@ -4134,34 +4089,24 @@
               <a:t>( </a:t>
             </a:r>
             <a:r>
-              <a:rPr lang="zh-CN" altLang="en-US" sz="2400" b="1" dirty="0" smtClean="0">
+              <a:rPr lang="zh-CN" altLang="en-US" sz="2400" b="1" dirty="0">
                 <a:solidFill>
                   <a:srgbClr val="000066"/>
                 </a:solidFill>
                 <a:latin typeface="Microsoft JhengHei" panose="020B0604030504040204" pitchFamily="34" charset="-120"/>
                 <a:ea typeface="Microsoft JhengHei" panose="020B0604030504040204" pitchFamily="34" charset="-120"/>
               </a:rPr>
-              <a:t>副</a:t>
-            </a:r>
-            <a:r>
-              <a:rPr lang="en-US" sz="2400" b="1" dirty="0" smtClean="0">
+              <a:t>副歌</a:t>
+            </a:r>
+            <a:r>
+              <a:rPr lang="en-US" sz="2400" b="1" dirty="0">
                 <a:solidFill>
                   <a:srgbClr val="000066"/>
                 </a:solidFill>
                 <a:latin typeface="Microsoft JhengHei" panose="020B0604030504040204" pitchFamily="34" charset="-120"/>
                 <a:ea typeface="Microsoft JhengHei" panose="020B0604030504040204" pitchFamily="34" charset="-120"/>
               </a:rPr>
-              <a:t> </a:t>
-            </a:r>
-            <a:r>
-              <a:rPr lang="en-US" sz="2400" b="1" dirty="0" smtClean="0">
-                <a:solidFill>
-                  <a:srgbClr val="000066"/>
-                </a:solidFill>
-                <a:latin typeface="Microsoft JhengHei" panose="020B0604030504040204" pitchFamily="34" charset="-120"/>
-                <a:ea typeface="Microsoft JhengHei" panose="020B0604030504040204" pitchFamily="34" charset="-120"/>
-              </a:rPr>
-              <a:t>)</a:t>
+              <a:t> )</a:t>
             </a:r>
             <a:endParaRPr lang="vi-VN" sz="2400" b="1" dirty="0">
               <a:solidFill>
@@ -4299,7 +4244,7 @@
           <a:p>
             <a:pPr algn="ctr"/>
             <a:r>
-              <a:rPr lang="en-US" sz="2400" b="1" dirty="0" smtClean="0">
+              <a:rPr lang="en-US" sz="2400" b="1" dirty="0">
                 <a:solidFill>
                   <a:srgbClr val="000066"/>
                 </a:solidFill>
@@ -4309,34 +4254,24 @@
               <a:t>( </a:t>
             </a:r>
             <a:r>
-              <a:rPr lang="zh-CN" altLang="en-US" sz="2400" b="1" dirty="0" smtClean="0">
+              <a:rPr lang="zh-CN" altLang="en-US" sz="2400" b="1" dirty="0">
                 <a:solidFill>
                   <a:srgbClr val="000066"/>
                 </a:solidFill>
                 <a:latin typeface="Microsoft JhengHei" panose="020B0604030504040204" pitchFamily="34" charset="-120"/>
                 <a:ea typeface="Microsoft JhengHei" panose="020B0604030504040204" pitchFamily="34" charset="-120"/>
               </a:rPr>
-              <a:t>副</a:t>
-            </a:r>
-            <a:r>
-              <a:rPr lang="en-US" sz="2400" b="1" dirty="0" smtClean="0">
+              <a:t>副歌</a:t>
+            </a:r>
+            <a:r>
+              <a:rPr lang="en-US" sz="2400" b="1" dirty="0">
                 <a:solidFill>
                   <a:srgbClr val="000066"/>
                 </a:solidFill>
                 <a:latin typeface="Microsoft JhengHei" panose="020B0604030504040204" pitchFamily="34" charset="-120"/>
                 <a:ea typeface="Microsoft JhengHei" panose="020B0604030504040204" pitchFamily="34" charset="-120"/>
               </a:rPr>
-              <a:t> </a:t>
-            </a:r>
-            <a:r>
-              <a:rPr lang="en-US" sz="2400" b="1" dirty="0" smtClean="0">
-                <a:solidFill>
-                  <a:srgbClr val="000066"/>
-                </a:solidFill>
-                <a:latin typeface="Microsoft JhengHei" panose="020B0604030504040204" pitchFamily="34" charset="-120"/>
-                <a:ea typeface="Microsoft JhengHei" panose="020B0604030504040204" pitchFamily="34" charset="-120"/>
-              </a:rPr>
-              <a:t>)</a:t>
+              <a:t> )</a:t>
             </a:r>
             <a:endParaRPr lang="vi-VN" sz="2400" b="1" dirty="0">
               <a:solidFill>
@@ -4474,7 +4409,7 @@
           <a:p>
             <a:pPr algn="ctr"/>
             <a:r>
-              <a:rPr lang="en-US" sz="2400" b="1" dirty="0" smtClean="0">
+              <a:rPr lang="en-US" sz="2400" b="1" dirty="0">
                 <a:solidFill>
                   <a:srgbClr val="000066"/>
                 </a:solidFill>
@@ -4484,34 +4419,24 @@
               <a:t>( </a:t>
             </a:r>
             <a:r>
-              <a:rPr lang="zh-CN" altLang="en-US" sz="2400" b="1" dirty="0" smtClean="0">
+              <a:rPr lang="zh-CN" altLang="en-US" sz="2400" b="1" dirty="0">
                 <a:solidFill>
                   <a:srgbClr val="000066"/>
                 </a:solidFill>
                 <a:latin typeface="Microsoft JhengHei" panose="020B0604030504040204" pitchFamily="34" charset="-120"/>
                 <a:ea typeface="Microsoft JhengHei" panose="020B0604030504040204" pitchFamily="34" charset="-120"/>
               </a:rPr>
-              <a:t>副</a:t>
-            </a:r>
-            <a:r>
-              <a:rPr lang="en-US" sz="2400" b="1" dirty="0" smtClean="0">
+              <a:t>副歌</a:t>
+            </a:r>
+            <a:r>
+              <a:rPr lang="en-US" sz="2400" b="1" dirty="0">
                 <a:solidFill>
                   <a:srgbClr val="000066"/>
                 </a:solidFill>
                 <a:latin typeface="Microsoft JhengHei" panose="020B0604030504040204" pitchFamily="34" charset="-120"/>
                 <a:ea typeface="Microsoft JhengHei" panose="020B0604030504040204" pitchFamily="34" charset="-120"/>
               </a:rPr>
-              <a:t> </a:t>
-            </a:r>
-            <a:r>
-              <a:rPr lang="en-US" sz="2400" b="1" dirty="0" smtClean="0">
-                <a:solidFill>
-                  <a:srgbClr val="000066"/>
-                </a:solidFill>
-                <a:latin typeface="Microsoft JhengHei" panose="020B0604030504040204" pitchFamily="34" charset="-120"/>
-                <a:ea typeface="Microsoft JhengHei" panose="020B0604030504040204" pitchFamily="34" charset="-120"/>
-              </a:rPr>
-              <a:t>)</a:t>
+              <a:t> )</a:t>
             </a:r>
             <a:endParaRPr lang="vi-VN" sz="2400" b="1" dirty="0">
               <a:solidFill>
